--- a/заняття_8_django_orm_cbv/презентація/django_orm_lesson.pptx
+++ b/заняття_8_django_orm_cbv/презентація/django_orm_lesson.pptx
@@ -2359,7 +2359,7 @@
               <a:buNone/>
             </a:pPr>
             <a:r>
-              <a:rPr lang="en-US" sz="3400" dirty="0">
+              <a:rPr lang="en-US" sz="2400" dirty="0">
                 <a:solidFill>
                   <a:srgbClr val="FFFFFF"/>
                 </a:solidFill>
@@ -2367,9 +2367,20 @@
                 <a:ea typeface="Arial Black" pitchFamily="34" charset="-122"/>
                 <a:cs typeface="Arial Black" pitchFamily="34" charset="-120"/>
               </a:rPr>
-              <a:t>ORM, Шаблони та CBV</a:t>
-            </a:r>
-            <a:endParaRPr lang="en-US" sz="3400" dirty="0"/>
+              <a:t>ORM, Шаблони та </a:t>
+            </a:r>
+            <a:r>
+              <a:rPr lang="uk-UA" sz="2400" dirty="0">
+                <a:solidFill>
+                  <a:srgbClr val="FFFFFF"/>
+                </a:solidFill>
+                <a:latin typeface="Arial Black" pitchFamily="34" charset="0"/>
+                <a:ea typeface="Arial Black" pitchFamily="34" charset="-122"/>
+                <a:cs typeface="Arial Black" pitchFamily="34" charset="-120"/>
+              </a:rPr>
+              <a:t>звʼязки між моделями</a:t>
+            </a:r>
+            <a:endParaRPr lang="en-US" sz="2400" dirty="0"/>
           </a:p>
         </p:txBody>
       </p:sp>

--- a/заняття_8_django_orm_cbv/презентація/django_orm_lesson.pptx
+++ b/заняття_8_django_orm_cbv/презентація/django_orm_lesson.pptx
@@ -6402,7 +6402,29 @@
                 <a:ea typeface="Calibri" pitchFamily="34" charset="-122"/>
                 <a:cs typeface="Calibri" pitchFamily="34" charset="-120"/>
               </a:rPr>
-              <a:t>Один курс → багато уроків.</a:t>
+              <a:t>Один курс → багато </a:t>
+            </a:r>
+            <a:r>
+              <a:rPr lang="uk-UA" sz="1300" dirty="0">
+                <a:solidFill>
+                  <a:srgbClr val="0F2A3F"/>
+                </a:solidFill>
+                <a:latin typeface="Calibri" pitchFamily="34" charset="0"/>
+                <a:ea typeface="Calibri" pitchFamily="34" charset="-122"/>
+                <a:cs typeface="Calibri" pitchFamily="34" charset="-120"/>
+              </a:rPr>
+              <a:t>модулів</a:t>
+            </a:r>
+            <a:r>
+              <a:rPr lang="en-US" sz="1300" dirty="0">
+                <a:solidFill>
+                  <a:srgbClr val="0F2A3F"/>
+                </a:solidFill>
+                <a:latin typeface="Calibri" pitchFamily="34" charset="0"/>
+                <a:ea typeface="Calibri" pitchFamily="34" charset="-122"/>
+                <a:cs typeface="Calibri" pitchFamily="34" charset="-120"/>
+              </a:rPr>
+              <a:t>.</a:t>
             </a:r>
             <a:endParaRPr lang="en-US" sz="1300" dirty="0"/>
           </a:p>
@@ -7318,7 +7340,7 @@
         </p:nvSpPr>
         <p:spPr>
           <a:xfrm>
-            <a:off x="548640" y="987552"/>
+            <a:off x="548640" y="1120140"/>
             <a:ext cx="3200400" cy="347472"/>
           </a:xfrm>
           <a:prstGeom prst="rect">
@@ -10907,7 +10929,7 @@
         </p:nvSpPr>
         <p:spPr>
           <a:xfrm>
-            <a:off x="2231136" y="2011680"/>
+            <a:off x="2185416" y="2011680"/>
             <a:ext cx="365760" cy="365760"/>
           </a:xfrm>
           <a:prstGeom prst="rect">
@@ -11128,7 +11150,7 @@
         </p:nvSpPr>
         <p:spPr>
           <a:xfrm>
-            <a:off x="4407408" y="2011680"/>
+            <a:off x="4377690" y="2014621"/>
             <a:ext cx="365760" cy="365760"/>
           </a:xfrm>
           <a:prstGeom prst="rect">
@@ -11349,7 +11371,7 @@
         </p:nvSpPr>
         <p:spPr>
           <a:xfrm>
-            <a:off x="6583680" y="2011680"/>
+            <a:off x="6537960" y="2002728"/>
             <a:ext cx="365760" cy="365760"/>
           </a:xfrm>
           <a:prstGeom prst="rect">
@@ -11629,7 +11651,7 @@
                 <a:ea typeface="Calibri" pitchFamily="34" charset="-122"/>
                 <a:cs typeface="Calibri" pitchFamily="34" charset="-120"/>
               </a:rPr>
-              <a:t>Ми ніколи</a:t>
+              <a:t>Ми </a:t>
             </a:r>
             <a:r>
               <a:rPr lang="en-US" sz="1400" dirty="0">
@@ -11640,7 +11662,7 @@
                 <a:ea typeface="Calibri" pitchFamily="34" charset="-122"/>
                 <a:cs typeface="Calibri" pitchFamily="34" charset="-120"/>
               </a:rPr>
-              <a:t> не пишемо SQL вручну. ORM перетворює Python-код у запити до бази автоматично.</a:t>
+              <a:t>не пишемо SQL вручну. ORM перетворює Python-код у запити до бази автоматично.</a:t>
             </a:r>
             <a:endParaRPr lang="en-US" sz="1400" dirty="0"/>
           </a:p>
@@ -13342,7 +13364,29 @@
                 <a:ea typeface="Calibri" pitchFamily="34" charset="-122"/>
                 <a:cs typeface="Calibri" pitchFamily="34" charset="-120"/>
               </a:rPr>
-              <a:t>Уявіть Course.objects як пошуковика по таблиці курсів. Ви «запитуєте» у нього: дай мені всі курси, дай тільки активні, дай один конкретний.</a:t>
+              <a:t>Уявіть Course.objects як пошуковика по таблиці курсів. Ви «запитуєте» у нього: дай мені всі курси, дай тільки </a:t>
+            </a:r>
+            <a:r>
+              <a:rPr lang="uk-UA" sz="1400" dirty="0">
+                <a:solidFill>
+                  <a:srgbClr val="0F2A3F"/>
+                </a:solidFill>
+                <a:latin typeface="Calibri" pitchFamily="34" charset="0"/>
+                <a:ea typeface="Calibri" pitchFamily="34" charset="-122"/>
+                <a:cs typeface="Calibri" pitchFamily="34" charset="-120"/>
+              </a:rPr>
+              <a:t>тестові</a:t>
+            </a:r>
+            <a:r>
+              <a:rPr lang="en-US" sz="1400" dirty="0">
+                <a:solidFill>
+                  <a:srgbClr val="0F2A3F"/>
+                </a:solidFill>
+                <a:latin typeface="Calibri" pitchFamily="34" charset="0"/>
+                <a:ea typeface="Calibri" pitchFamily="34" charset="-122"/>
+                <a:cs typeface="Calibri" pitchFamily="34" charset="-120"/>
+              </a:rPr>
+              <a:t>, дай один конкретний.</a:t>
             </a:r>
             <a:endParaRPr lang="en-US" sz="1400" dirty="0"/>
           </a:p>
@@ -13588,7 +13632,7 @@
                 <a:ea typeface="Consolas" pitchFamily="34" charset="-122"/>
                 <a:cs typeface="Consolas" pitchFamily="34" charset="-120"/>
               </a:rPr>
-              <a:t>Course.objects.filter(is_test=False)</a:t>
+              <a:t>Course.objects.filter(is_test=True)</a:t>
             </a:r>
             <a:endParaRPr lang="en-US" sz="1200" dirty="0"/>
           </a:p>
